--- a/foundation/building-blocks/solution-building-blocks/SB-003/components-and-summary.pptx
+++ b/foundation/building-blocks/solution-building-blocks/SB-003/components-and-summary.pptx
@@ -3140,7 +3140,7 @@
         <p:spPr>
           <a:xfrm>
             <a:off x="223637" y="720989"/>
-            <a:ext cx="5491194" cy="5491194"/>
+            <a:ext cx="5711629" cy="5491194"/>
           </a:xfrm>
           <a:prstGeom prst="rect">
             <a:avLst/>
@@ -3149,14 +3149,14 @@
       </p:pic>
       <p:pic>
         <p:nvPicPr>
-          <p:cNvPr id="4" name="Picture 3" descr="components.png"/>
+          <p:cNvPr id="4" name="Picture 3" descr="summary.png"/>
           <p:cNvPicPr>
             <a:picLocks noChangeAspect="1"/>
           </p:cNvPicPr>
           <p:nvPr/>
         </p:nvPicPr>
         <p:blipFill>
-          <a:blip r:embed="rId2"/>
+          <a:blip r:embed="rId3"/>
           <a:stretch>
             <a:fillRect/>
           </a:stretch>
@@ -3164,7 +3164,7 @@
         <p:spPr>
           <a:xfrm>
             <a:off x="6516759" y="669618"/>
-            <a:ext cx="5387458" cy="5387458"/>
+            <a:ext cx="5387458" cy="5611748"/>
           </a:xfrm>
           <a:prstGeom prst="rect">
             <a:avLst/>
